--- a/docs/content/multiple_regression/multiple_regression_lecture.pptx
+++ b/docs/content/multiple_regression/multiple_regression_lecture.pptx
@@ -9671,7 +9671,7 @@
         </p:blipFill>
         <p:spPr bwMode="auto">
           <a:xfrm>
-            <a:off x="0" y="952500"/>
+            <a:off x="0" y="698500"/>
             <a:ext cx="6007100" cy="3886200"/>
           </a:xfrm>
           <a:prstGeom prst="rect">
@@ -9685,6 +9685,38 @@
           </a:ln>
         </p:spPr>
       </p:pic>
+      <p:sp>
+        <p:nvSpPr>
+          <p:cNvPr id="1" name="TextBox 3"/>
+          <p:cNvSpPr txBox="1"/>
+          <p:nvPr>
+            <p:ph idx="1"/>
+          </p:nvPr>
+        </p:nvSpPr>
+        <p:spPr>
+          <a:xfrm>
+            <a:off x="0" y="4622800"/>
+            <a:ext cx="6007100" cy="508000"/>
+          </a:xfrm>
+          <a:prstGeom prst="rect">
+            <a:avLst/>
+          </a:prstGeom>
+          <a:noFill/>
+        </p:spPr>
+        <p:txBody>
+          <a:bodyPr/>
+          <a:lstStyle/>
+          <a:p>
+            <a:pPr lvl="0" indent="0" marL="0" algn="ctr">
+              <a:buNone/>
+            </a:pPr>
+            <a:r>
+              <a:rPr/>
+              <a:t>R console output for a linear model regressing total net primary productivity on mean annual temperature, mean annual precipitation, and a three-level fertility factor (High reference, Low, Med), showing the coefficient table with all predictors highly significant (p &lt; 0.001) and dummy-variable coefficients of 205.16 for Low and 116.33 for Medium fertility relative to High.</a:t>
+            </a:r>
+          </a:p>
+        </p:txBody>
+      </p:sp>
       <p:pic>
         <p:nvPicPr>
           <p:cNvPr descr="images/clipboard-3285444079.png" id="0" name="Picture 1"/>
@@ -9701,7 +9733,7 @@
         </p:blipFill>
         <p:spPr bwMode="auto">
           <a:xfrm>
-            <a:off x="6121400" y="1422400"/>
+            <a:off x="6121400" y="1168400"/>
             <a:ext cx="2781300" cy="2933700"/>
           </a:xfrm>
           <a:prstGeom prst="rect">
@@ -9715,6 +9747,38 @@
           </a:ln>
         </p:spPr>
       </p:pic>
+      <p:sp>
+        <p:nvSpPr>
+          <p:cNvPr id="1" name="TextBox 3"/>
+          <p:cNvSpPr txBox="1"/>
+          <p:nvPr>
+            <p:ph idx="1"/>
+          </p:nvPr>
+        </p:nvSpPr>
+        <p:spPr>
+          <a:xfrm>
+            <a:off x="6121400" y="4622800"/>
+            <a:ext cx="2781300" cy="508000"/>
+          </a:xfrm>
+          <a:prstGeom prst="rect">
+            <a:avLst/>
+          </a:prstGeom>
+          <a:noFill/>
+        </p:spPr>
+        <p:txBody>
+          <a:bodyPr/>
+          <a:lstStyle/>
+          <a:p>
+            <a:pPr lvl="0" indent="0" marL="0" algn="ctr">
+              <a:buNone/>
+            </a:pPr>
+            <a:r>
+              <a:rPr/>
+              <a:t>Boxplot of net primary productivity by fertility category (High, Low, Med), showing the Low fertility group with the highest median productivity, matching the positive dummy-variable coefficients shown in the accompanying regression output.</a:t>
+            </a:r>
+          </a:p>
+        </p:txBody>
+      </p:sp>
     </p:spTree>
   </p:cSld>
 </p:sld>
@@ -13189,7 +13253,7 @@
         </p:blipFill>
         <p:spPr bwMode="auto">
           <a:xfrm>
-            <a:off x="6121400" y="1854200"/>
+            <a:off x="6121400" y="1600200"/>
             <a:ext cx="2781300" cy="2070100"/>
           </a:xfrm>
           <a:prstGeom prst="rect">
@@ -13203,6 +13267,38 @@
           </a:ln>
         </p:spPr>
       </p:pic>
+      <p:sp>
+        <p:nvSpPr>
+          <p:cNvPr id="1" name="TextBox 3"/>
+          <p:cNvSpPr txBox="1"/>
+          <p:nvPr>
+            <p:ph idx="1"/>
+          </p:nvPr>
+        </p:nvSpPr>
+        <p:spPr>
+          <a:xfrm>
+            <a:off x="6121400" y="4622800"/>
+            <a:ext cx="2781300" cy="508000"/>
+          </a:xfrm>
+          <a:prstGeom prst="rect">
+            <a:avLst/>
+          </a:prstGeom>
+          <a:noFill/>
+        </p:spPr>
+        <p:txBody>
+          <a:bodyPr/>
+          <a:lstStyle/>
+          <a:p>
+            <a:pPr lvl="0" indent="0" marL="0" algn="ctr">
+              <a:buNone/>
+            </a:pPr>
+            <a:r>
+              <a:rPr/>
+              <a:t>Stock photo of a frustrated man in a suit punching through a laptop screen, used humorously to illustrate the frustration multiple regression’s challenges (overfitting, multicollinearity, model selection) can cause.</a:t>
+            </a:r>
+          </a:p>
+        </p:txBody>
+      </p:sp>
     </p:spTree>
   </p:cSld>
 </p:sld>
